--- a/char-pres.pptx
+++ b/char-pres.pptx
@@ -7,7 +7,6 @@
   <p:sldIdLst>
     <p:sldId id="256" r:id="rId2"/>
     <p:sldId id="257" r:id="rId3"/>
-    <p:sldId id="258" r:id="rId4"/>
   </p:sldIdLst>
   <p:sldSz cx="12192000" cy="6858000"/>
   <p:notesSz cx="6858000" cy="9144000"/>
@@ -106,6 +105,11 @@
       </a:defRPr>
     </a:lvl9pPr>
   </p:defaultTextStyle>
+  <p:extLst>
+    <p:ext uri="{EFAFB233-063F-42B5-8137-9DF3F51BA10A}">
+      <p15:sldGuideLst xmlns:p15="http://schemas.microsoft.com/office/powerpoint/2012/main"/>
+    </p:ext>
+  </p:extLst>
 </p:presentation>
 </file>
 
@@ -256,7 +260,7 @@
           <a:p>
             <a:fld id="{E6796E67-1F31-4579-B62A-57BEC465A4CF}" type="datetimeFigureOut">
               <a:rPr lang="en-US" smtClean="0"/>
-              <a:t>10/5/2026</a:t>
+              <a:t>10/19/2026</a:t>
             </a:fld>
             <a:endParaRPr lang="en-US"/>
           </a:p>
@@ -454,7 +458,7 @@
           <a:p>
             <a:fld id="{E6796E67-1F31-4579-B62A-57BEC465A4CF}" type="datetimeFigureOut">
               <a:rPr lang="en-US" smtClean="0"/>
-              <a:t>10/5/2026</a:t>
+              <a:t>10/19/2026</a:t>
             </a:fld>
             <a:endParaRPr lang="en-US"/>
           </a:p>
@@ -662,7 +666,7 @@
           <a:p>
             <a:fld id="{E6796E67-1F31-4579-B62A-57BEC465A4CF}" type="datetimeFigureOut">
               <a:rPr lang="en-US" smtClean="0"/>
-              <a:t>10/5/2026</a:t>
+              <a:t>10/19/2026</a:t>
             </a:fld>
             <a:endParaRPr lang="en-US"/>
           </a:p>
@@ -860,7 +864,7 @@
           <a:p>
             <a:fld id="{E6796E67-1F31-4579-B62A-57BEC465A4CF}" type="datetimeFigureOut">
               <a:rPr lang="en-US" smtClean="0"/>
-              <a:t>10/5/2026</a:t>
+              <a:t>10/19/2026</a:t>
             </a:fld>
             <a:endParaRPr lang="en-US"/>
           </a:p>
@@ -1135,7 +1139,7 @@
           <a:p>
             <a:fld id="{E6796E67-1F31-4579-B62A-57BEC465A4CF}" type="datetimeFigureOut">
               <a:rPr lang="en-US" smtClean="0"/>
-              <a:t>10/5/2026</a:t>
+              <a:t>10/19/2026</a:t>
             </a:fld>
             <a:endParaRPr lang="en-US"/>
           </a:p>
@@ -1400,7 +1404,7 @@
           <a:p>
             <a:fld id="{E6796E67-1F31-4579-B62A-57BEC465A4CF}" type="datetimeFigureOut">
               <a:rPr lang="en-US" smtClean="0"/>
-              <a:t>10/5/2026</a:t>
+              <a:t>10/19/2026</a:t>
             </a:fld>
             <a:endParaRPr lang="en-US"/>
           </a:p>
@@ -1812,7 +1816,7 @@
           <a:p>
             <a:fld id="{E6796E67-1F31-4579-B62A-57BEC465A4CF}" type="datetimeFigureOut">
               <a:rPr lang="en-US" smtClean="0"/>
-              <a:t>10/5/2026</a:t>
+              <a:t>10/19/2026</a:t>
             </a:fld>
             <a:endParaRPr lang="en-US"/>
           </a:p>
@@ -1953,7 +1957,7 @@
           <a:p>
             <a:fld id="{E6796E67-1F31-4579-B62A-57BEC465A4CF}" type="datetimeFigureOut">
               <a:rPr lang="en-US" smtClean="0"/>
-              <a:t>10/5/2026</a:t>
+              <a:t>10/19/2026</a:t>
             </a:fld>
             <a:endParaRPr lang="en-US"/>
           </a:p>
@@ -2066,7 +2070,7 @@
           <a:p>
             <a:fld id="{E6796E67-1F31-4579-B62A-57BEC465A4CF}" type="datetimeFigureOut">
               <a:rPr lang="en-US" smtClean="0"/>
-              <a:t>10/5/2026</a:t>
+              <a:t>10/19/2026</a:t>
             </a:fld>
             <a:endParaRPr lang="en-US"/>
           </a:p>
@@ -2377,7 +2381,7 @@
           <a:p>
             <a:fld id="{E6796E67-1F31-4579-B62A-57BEC465A4CF}" type="datetimeFigureOut">
               <a:rPr lang="en-US" smtClean="0"/>
-              <a:t>10/5/2026</a:t>
+              <a:t>10/19/2026</a:t>
             </a:fld>
             <a:endParaRPr lang="en-US"/>
           </a:p>
@@ -2665,7 +2669,7 @@
           <a:p>
             <a:fld id="{E6796E67-1F31-4579-B62A-57BEC465A4CF}" type="datetimeFigureOut">
               <a:rPr lang="en-US" smtClean="0"/>
-              <a:t>10/5/2026</a:t>
+              <a:t>10/19/2026</a:t>
             </a:fld>
             <a:endParaRPr lang="en-US"/>
           </a:p>
@@ -2906,7 +2910,7 @@
           <a:p>
             <a:fld id="{E6796E67-1F31-4579-B62A-57BEC465A4CF}" type="datetimeFigureOut">
               <a:rPr lang="en-US" smtClean="0"/>
-              <a:t>10/5/2026</a:t>
+              <a:t>10/19/2026</a:t>
             </a:fld>
             <a:endParaRPr lang="en-US"/>
           </a:p>
@@ -3325,10 +3329,10 @@
       </p:grpSpPr>
       <p:pic>
         <p:nvPicPr>
-          <p:cNvPr id="5" name="Picture 4">
-            <a:extLst>
-              <a:ext uri="{FF2B5EF4-FFF2-40B4-BE49-F238E27FC236}">
-                <a16:creationId xmlns:a16="http://schemas.microsoft.com/office/drawing/2014/main" id="{D0945561-5AFE-E33B-156B-9E0B6A951DBC}"/>
+          <p:cNvPr id="2" name="Picture 1" descr="Image">
+            <a:extLst>
+              <a:ext uri="{FF2B5EF4-FFF2-40B4-BE49-F238E27FC236}">
+                <a16:creationId xmlns:a16="http://schemas.microsoft.com/office/drawing/2014/main" id="{146755A0-95F6-73EF-F2D2-6CADE4A84503}"/>
               </a:ext>
             </a:extLst>
           </p:cNvPr>
@@ -3345,8 +3349,8 @@
         </p:blipFill>
         <p:spPr>
           <a:xfrm>
-            <a:off x="823605" y="128587"/>
-            <a:ext cx="4429125" cy="6600825"/>
+            <a:off x="855406" y="536459"/>
+            <a:ext cx="3283974" cy="5785082"/>
           </a:xfrm>
           <a:prstGeom prst="rect">
             <a:avLst/>
@@ -3355,10 +3359,10 @@
       </p:pic>
       <p:pic>
         <p:nvPicPr>
-          <p:cNvPr id="7" name="Picture 6">
-            <a:extLst>
-              <a:ext uri="{FF2B5EF4-FFF2-40B4-BE49-F238E27FC236}">
-                <a16:creationId xmlns:a16="http://schemas.microsoft.com/office/drawing/2014/main" id="{F182A86E-7A20-25A2-E37F-27A93258E4CD}"/>
+          <p:cNvPr id="3" name="Picture 2" descr="Image">
+            <a:extLst>
+              <a:ext uri="{FF2B5EF4-FFF2-40B4-BE49-F238E27FC236}">
+                <a16:creationId xmlns:a16="http://schemas.microsoft.com/office/drawing/2014/main" id="{16FB6011-EF82-C2B0-1161-986932787F30}"/>
               </a:ext>
             </a:extLst>
           </p:cNvPr>
@@ -3375,8 +3379,38 @@
         </p:blipFill>
         <p:spPr>
           <a:xfrm>
-            <a:off x="5818947" y="128587"/>
-            <a:ext cx="5549448" cy="6600826"/>
+            <a:off x="4249832" y="536458"/>
+            <a:ext cx="3692336" cy="5792289"/>
+          </a:xfrm>
+          <a:prstGeom prst="rect">
+            <a:avLst/>
+          </a:prstGeom>
+        </p:spPr>
+      </p:pic>
+      <p:pic>
+        <p:nvPicPr>
+          <p:cNvPr id="6" name="Picture 5">
+            <a:extLst>
+              <a:ext uri="{FF2B5EF4-FFF2-40B4-BE49-F238E27FC236}">
+                <a16:creationId xmlns:a16="http://schemas.microsoft.com/office/drawing/2014/main" id="{5932ED58-4A2A-CAB2-288D-4960EEC728B7}"/>
+              </a:ext>
+            </a:extLst>
+          </p:cNvPr>
+          <p:cNvPicPr>
+            <a:picLocks noChangeAspect="1"/>
+          </p:cNvPicPr>
+          <p:nvPr/>
+        </p:nvPicPr>
+        <p:blipFill>
+          <a:blip r:embed="rId4"/>
+          <a:stretch>
+            <a:fillRect/>
+          </a:stretch>
+        </p:blipFill>
+        <p:spPr>
+          <a:xfrm>
+            <a:off x="8247433" y="1162963"/>
+            <a:ext cx="3625659" cy="4532074"/>
           </a:xfrm>
           <a:prstGeom prst="rect">
             <a:avLst/>
@@ -3415,10 +3449,10 @@
       </p:grpSpPr>
       <p:pic>
         <p:nvPicPr>
-          <p:cNvPr id="5" name="Picture 4">
-            <a:extLst>
-              <a:ext uri="{FF2B5EF4-FFF2-40B4-BE49-F238E27FC236}">
-                <a16:creationId xmlns:a16="http://schemas.microsoft.com/office/drawing/2014/main" id="{FE356C1F-B923-C6B8-5FF1-980F445B38AE}"/>
+          <p:cNvPr id="4" name="Picture 3" descr="Image">
+            <a:extLst>
+              <a:ext uri="{FF2B5EF4-FFF2-40B4-BE49-F238E27FC236}">
+                <a16:creationId xmlns:a16="http://schemas.microsoft.com/office/drawing/2014/main" id="{62475203-2173-D1AF-EBF1-B0EF9A4BD8FB}"/>
               </a:ext>
             </a:extLst>
           </p:cNvPr>
@@ -3435,8 +3469,8 @@
         </p:blipFill>
         <p:spPr>
           <a:xfrm>
-            <a:off x="739880" y="219997"/>
-            <a:ext cx="6418005" cy="6418005"/>
+            <a:off x="696377" y="416518"/>
+            <a:ext cx="3023289" cy="2883557"/>
           </a:xfrm>
           <a:prstGeom prst="rect">
             <a:avLst/>
@@ -3445,10 +3479,10 @@
       </p:pic>
       <p:pic>
         <p:nvPicPr>
-          <p:cNvPr id="7" name="Picture 6">
-            <a:extLst>
-              <a:ext uri="{FF2B5EF4-FFF2-40B4-BE49-F238E27FC236}">
-                <a16:creationId xmlns:a16="http://schemas.microsoft.com/office/drawing/2014/main" id="{C068E057-A010-98EF-3B38-22EA720D89AF}"/>
+          <p:cNvPr id="9" name="Picture 8">
+            <a:extLst>
+              <a:ext uri="{FF2B5EF4-FFF2-40B4-BE49-F238E27FC236}">
+                <a16:creationId xmlns:a16="http://schemas.microsoft.com/office/drawing/2014/main" id="{879EC125-BD3F-AA91-C3CC-495DD84B04C5}"/>
               </a:ext>
             </a:extLst>
           </p:cNvPr>
@@ -3465,8 +3499,8 @@
         </p:blipFill>
         <p:spPr>
           <a:xfrm>
-            <a:off x="8364790" y="219997"/>
-            <a:ext cx="3087329" cy="3087329"/>
+            <a:off x="4207388" y="416518"/>
+            <a:ext cx="3023289" cy="3834415"/>
           </a:xfrm>
           <a:prstGeom prst="rect">
             <a:avLst/>
@@ -3475,10 +3509,10 @@
       </p:pic>
       <p:pic>
         <p:nvPicPr>
-          <p:cNvPr id="8" name="Picture 7">
-            <a:extLst>
-              <a:ext uri="{FF2B5EF4-FFF2-40B4-BE49-F238E27FC236}">
-                <a16:creationId xmlns:a16="http://schemas.microsoft.com/office/drawing/2014/main" id="{FE358426-ACE4-833F-AA45-85BFA9D1A0D7}"/>
+          <p:cNvPr id="11" name="Picture 10">
+            <a:extLst>
+              <a:ext uri="{FF2B5EF4-FFF2-40B4-BE49-F238E27FC236}">
+                <a16:creationId xmlns:a16="http://schemas.microsoft.com/office/drawing/2014/main" id="{6E7C9329-7972-5EE1-D4C8-21783A098473}"/>
               </a:ext>
             </a:extLst>
           </p:cNvPr>
@@ -3495,116 +3529,123 @@
         </p:blipFill>
         <p:spPr>
           <a:xfrm>
-            <a:off x="8364791" y="3550673"/>
-            <a:ext cx="3087329" cy="3087329"/>
+            <a:off x="7718399" y="416518"/>
+            <a:ext cx="3777224" cy="4933517"/>
           </a:xfrm>
           <a:prstGeom prst="rect">
             <a:avLst/>
           </a:prstGeom>
         </p:spPr>
       </p:pic>
+      <p:sp>
+        <p:nvSpPr>
+          <p:cNvPr id="12" name="TextBox 11">
+            <a:extLst>
+              <a:ext uri="{FF2B5EF4-FFF2-40B4-BE49-F238E27FC236}">
+                <a16:creationId xmlns:a16="http://schemas.microsoft.com/office/drawing/2014/main" id="{5DBDEA59-D78A-39FC-83A5-BA155CF09248}"/>
+              </a:ext>
+            </a:extLst>
+          </p:cNvPr>
+          <p:cNvSpPr txBox="1"/>
+          <p:nvPr/>
+        </p:nvSpPr>
+        <p:spPr>
+          <a:xfrm>
+            <a:off x="696376" y="3384444"/>
+            <a:ext cx="3023289" cy="369332"/>
+          </a:xfrm>
+          <a:prstGeom prst="rect">
+            <a:avLst/>
+          </a:prstGeom>
+          <a:noFill/>
+        </p:spPr>
+        <p:txBody>
+          <a:bodyPr wrap="square" rtlCol="0">
+            <a:spAutoFit/>
+          </a:bodyPr>
+          <a:lstStyle/>
+          <a:p>
+            <a:r>
+              <a:rPr lang="en-US" dirty="0"/>
+              <a:t>Stage One</a:t>
+            </a:r>
+          </a:p>
+        </p:txBody>
+      </p:sp>
+      <p:sp>
+        <p:nvSpPr>
+          <p:cNvPr id="14" name="TextBox 13">
+            <a:extLst>
+              <a:ext uri="{FF2B5EF4-FFF2-40B4-BE49-F238E27FC236}">
+                <a16:creationId xmlns:a16="http://schemas.microsoft.com/office/drawing/2014/main" id="{2A632D82-091E-2CC9-5D95-923247B782F9}"/>
+              </a:ext>
+            </a:extLst>
+          </p:cNvPr>
+          <p:cNvSpPr txBox="1"/>
+          <p:nvPr/>
+        </p:nvSpPr>
+        <p:spPr>
+          <a:xfrm>
+            <a:off x="4207387" y="4280430"/>
+            <a:ext cx="3023289" cy="369332"/>
+          </a:xfrm>
+          <a:prstGeom prst="rect">
+            <a:avLst/>
+          </a:prstGeom>
+          <a:noFill/>
+        </p:spPr>
+        <p:txBody>
+          <a:bodyPr wrap="square" rtlCol="0">
+            <a:spAutoFit/>
+          </a:bodyPr>
+          <a:lstStyle/>
+          <a:p>
+            <a:r>
+              <a:rPr lang="en-US" dirty="0"/>
+              <a:t>Stage Two</a:t>
+            </a:r>
+          </a:p>
+        </p:txBody>
+      </p:sp>
+      <p:sp>
+        <p:nvSpPr>
+          <p:cNvPr id="16" name="TextBox 15">
+            <a:extLst>
+              <a:ext uri="{FF2B5EF4-FFF2-40B4-BE49-F238E27FC236}">
+                <a16:creationId xmlns:a16="http://schemas.microsoft.com/office/drawing/2014/main" id="{C7014D60-5840-5D21-CD9C-131D6417E4A8}"/>
+              </a:ext>
+            </a:extLst>
+          </p:cNvPr>
+          <p:cNvSpPr txBox="1"/>
+          <p:nvPr/>
+        </p:nvSpPr>
+        <p:spPr>
+          <a:xfrm>
+            <a:off x="7718399" y="5390615"/>
+            <a:ext cx="3023289" cy="369332"/>
+          </a:xfrm>
+          <a:prstGeom prst="rect">
+            <a:avLst/>
+          </a:prstGeom>
+          <a:noFill/>
+        </p:spPr>
+        <p:txBody>
+          <a:bodyPr wrap="square" rtlCol="0">
+            <a:spAutoFit/>
+          </a:bodyPr>
+          <a:lstStyle/>
+          <a:p>
+            <a:r>
+              <a:rPr lang="en-US" dirty="0"/>
+              <a:t>Stage Three</a:t>
+            </a:r>
+          </a:p>
+        </p:txBody>
+      </p:sp>
     </p:spTree>
     <p:extLst>
       <p:ext uri="{BB962C8B-B14F-4D97-AF65-F5344CB8AC3E}">
         <p14:creationId xmlns:p14="http://schemas.microsoft.com/office/powerpoint/2010/main" val="2031359928"/>
-      </p:ext>
-    </p:extLst>
-  </p:cSld>
-  <p:clrMapOvr>
-    <a:masterClrMapping/>
-  </p:clrMapOvr>
-</p:sld>
-</file>
-
-<file path=ppt/slides/slide3.xml><?xml version="1.0" encoding="utf-8"?>
-<p:sld xmlns:a="http://schemas.openxmlformats.org/drawingml/2006/main" xmlns:r="http://schemas.openxmlformats.org/officeDocument/2006/relationships" xmlns:p="http://schemas.openxmlformats.org/presentationml/2006/main">
-  <p:cSld>
-    <p:bg>
-      <p:bgPr>
-        <a:solidFill>
-          <a:schemeClr val="bg1"/>
-        </a:solidFill>
-        <a:effectLst/>
-      </p:bgPr>
-    </p:bg>
-    <p:spTree>
-      <p:nvGrpSpPr>
-        <p:cNvPr id="1" name=""/>
-        <p:cNvGrpSpPr/>
-        <p:nvPr/>
-      </p:nvGrpSpPr>
-      <p:grpSpPr>
-        <a:xfrm>
-          <a:off x="0" y="0"/>
-          <a:ext cx="0" cy="0"/>
-          <a:chOff x="0" y="0"/>
-          <a:chExt cx="0" cy="0"/>
-        </a:xfrm>
-      </p:grpSpPr>
-      <p:pic>
-        <p:nvPicPr>
-          <p:cNvPr id="6" name="Picture 5">
-            <a:extLst>
-              <a:ext uri="{FF2B5EF4-FFF2-40B4-BE49-F238E27FC236}">
-                <a16:creationId xmlns:a16="http://schemas.microsoft.com/office/drawing/2014/main" id="{23F69D1E-5930-B096-6AFE-0706610FF5D5}"/>
-              </a:ext>
-            </a:extLst>
-          </p:cNvPr>
-          <p:cNvPicPr>
-            <a:picLocks noChangeAspect="1"/>
-          </p:cNvPicPr>
-          <p:nvPr/>
-        </p:nvPicPr>
-        <p:blipFill>
-          <a:blip r:embed="rId2"/>
-          <a:stretch>
-            <a:fillRect/>
-          </a:stretch>
-        </p:blipFill>
-        <p:spPr>
-          <a:xfrm>
-            <a:off x="1060874" y="643467"/>
-            <a:ext cx="4456852" cy="5571066"/>
-          </a:xfrm>
-          <a:prstGeom prst="rect">
-            <a:avLst/>
-          </a:prstGeom>
-        </p:spPr>
-      </p:pic>
-      <p:pic>
-        <p:nvPicPr>
-          <p:cNvPr id="7" name="Picture 6">
-            <a:extLst>
-              <a:ext uri="{FF2B5EF4-FFF2-40B4-BE49-F238E27FC236}">
-                <a16:creationId xmlns:a16="http://schemas.microsoft.com/office/drawing/2014/main" id="{FF677DEF-834A-35C2-753E-2F93C4FCD4B7}"/>
-              </a:ext>
-            </a:extLst>
-          </p:cNvPr>
-          <p:cNvPicPr>
-            <a:picLocks noChangeAspect="1"/>
-          </p:cNvPicPr>
-          <p:nvPr/>
-        </p:nvPicPr>
-        <p:blipFill>
-          <a:blip r:embed="rId3"/>
-          <a:stretch>
-            <a:fillRect/>
-          </a:stretch>
-        </p:blipFill>
-        <p:spPr>
-          <a:xfrm>
-            <a:off x="6674272" y="643467"/>
-            <a:ext cx="4456852" cy="5571066"/>
-          </a:xfrm>
-          <a:prstGeom prst="rect">
-            <a:avLst/>
-          </a:prstGeom>
-        </p:spPr>
-      </p:pic>
-    </p:spTree>
-    <p:extLst>
-      <p:ext uri="{BB962C8B-B14F-4D97-AF65-F5344CB8AC3E}">
-        <p14:creationId xmlns:p14="http://schemas.microsoft.com/office/powerpoint/2010/main" val="1788161680"/>
       </p:ext>
     </p:extLst>
   </p:cSld>
